--- a/docs/content/analysis_of_variance/analysis_of_variance_lecture.pptx
+++ b/docs/content/analysis_of_variance/analysis_of_variance_lecture.pptx
@@ -57,6 +57,8 @@
     <p:sldId id="305" r:id="rId51"/>
     <p:sldId id="306" r:id="rId52"/>
     <p:sldId id="307" r:id="rId53"/>
+    <p:sldId id="308" r:id="rId54"/>
+    <p:sldId id="309" r:id="rId55"/>
   </p:sldIdLst>
   <p:sldSz cx="9144000" cy="5143500" type="screen16x9"/>
   <p:notesSz cx="6858000" cy="9144000"/>
@@ -3510,7 +3512,7 @@
       </p:sp>
       <p:pic>
         <p:nvPicPr>
-          <p:cNvPr descr="analysis_of_variance_lecture_files/figure-pptx/unnamed-chunk-4-1.png" id="0" name="Picture 1"/>
+          <p:cNvPr descr="analysis_of_variance_lecture_files/figure-pptx/analysis-of-variance-04-1.png" id="0" name="Picture 1"/>
           <p:cNvPicPr>
             <a:picLocks noGrp="1" noChangeAspect="1"/>
           </p:cNvPicPr>
@@ -3680,7 +3682,7 @@
       </p:sp>
       <p:pic>
         <p:nvPicPr>
-          <p:cNvPr descr="analysis_of_variance_lecture_files/figure-pptx/unnamed-chunk-5-1.png" id="0" name="Picture 1"/>
+          <p:cNvPr descr="analysis_of_variance_lecture_files/figure-pptx/analysis-of-variance-05-1.png" id="0" name="Picture 1"/>
           <p:cNvPicPr>
             <a:picLocks noGrp="1" noChangeAspect="1"/>
           </p:cNvPicPr>
@@ -4000,7 +4002,7 @@
       </mc:AlternateContent>
       <p:pic>
         <p:nvPicPr>
-          <p:cNvPr descr="analysis_of_variance_lecture_files/figure-pptx/unnamed-chunk-6-1.png" id="0" name="Picture 1"/>
+          <p:cNvPr descr="analysis_of_variance_lecture_files/figure-pptx/analysis-of-variance-06-1.png" id="0" name="Picture 1"/>
           <p:cNvPicPr>
             <a:picLocks noGrp="1" noChangeAspect="1"/>
           </p:cNvPicPr>
@@ -4751,7 +4753,7 @@
       </mc:AlternateContent>
       <p:pic>
         <p:nvPicPr>
-          <p:cNvPr descr="analysis_of_variance_lecture_files/figure-pptx/unnamed-chunk-7-1.png" id="0" name="Picture 1"/>
+          <p:cNvPr descr="analysis_of_variance_lecture_files/figure-pptx/analysis-of-variance-07-1.png" id="0" name="Picture 1"/>
           <p:cNvPicPr>
             <a:picLocks noGrp="1" noChangeAspect="1"/>
           </p:cNvPicPr>
@@ -5849,7 +5851,7 @@
       </mc:AlternateContent>
       <p:pic>
         <p:nvPicPr>
-          <p:cNvPr descr="analysis_of_variance_lecture_files/figure-pptx/unnamed-chunk-11-1.png" id="0" name="Picture 1"/>
+          <p:cNvPr descr="analysis_of_variance_lecture_files/figure-pptx/analysis-of-variance-11-1.png" id="0" name="Picture 1"/>
           <p:cNvPicPr>
             <a:picLocks noGrp="1" noChangeAspect="1"/>
           </p:cNvPicPr>
@@ -6930,7 +6932,7 @@
       </mc:AlternateContent>
       <p:pic>
         <p:nvPicPr>
-          <p:cNvPr descr="analysis_of_variance_lecture_files/figure-pptx/unnamed-chunk-14-1.png" id="0" name="Picture 1"/>
+          <p:cNvPr descr="analysis_of_variance_lecture_files/figure-pptx/analysis-of-variance-14-1.png" id="0" name="Picture 1"/>
           <p:cNvPicPr>
             <a:picLocks noGrp="1" noChangeAspect="1"/>
           </p:cNvPicPr>
@@ -7379,7 +7381,7 @@
       </mc:AlternateContent>
       <p:pic>
         <p:nvPicPr>
-          <p:cNvPr descr="analysis_of_variance_lecture_files/figure-pptx/unnamed-chunk-15-1.png" id="0" name="Picture 1"/>
+          <p:cNvPr descr="analysis_of_variance_lecture_files/figure-pptx/analysis-of-variance-15-1.png" id="0" name="Picture 1"/>
           <p:cNvPicPr>
             <a:picLocks noGrp="1" noChangeAspect="1"/>
           </p:cNvPicPr>
@@ -7699,7 +7701,7 @@
       </p:sp>
       <p:pic>
         <p:nvPicPr>
-          <p:cNvPr descr="analysis_of_variance_lecture_files/figure-pptx/unnamed-chunk-16-1.png" id="0" name="Picture 1"/>
+          <p:cNvPr descr="analysis_of_variance_lecture_files/figure-pptx/analysis-of-variance-16-1.png" id="0" name="Picture 1"/>
           <p:cNvPicPr>
             <a:picLocks noGrp="1" noChangeAspect="1"/>
           </p:cNvPicPr>
@@ -10325,7 +10327,7 @@
       </p:sp>
       <p:pic>
         <p:nvPicPr>
-          <p:cNvPr descr="analysis_of_variance_lecture_files/figure-pptx/unnamed-chunk-23-1.png" id="0" name="Picture 1"/>
+          <p:cNvPr descr="analysis_of_variance_lecture_files/figure-pptx/analysis-of-variance-23-1.png" id="0" name="Picture 1"/>
           <p:cNvPicPr>
             <a:picLocks noGrp="1" noChangeAspect="1"/>
           </p:cNvPicPr>
@@ -10468,7 +10470,7 @@
       </p:sp>
       <p:pic>
         <p:nvPicPr>
-          <p:cNvPr descr="analysis_of_variance_lecture_files/figure-pptx/unnamed-chunk-24-1.png" id="0" name="Picture 1"/>
+          <p:cNvPr descr="analysis_of_variance_lecture_files/figure-pptx/analysis-of-variance-24-1.png" id="0" name="Picture 1"/>
           <p:cNvPicPr>
             <a:picLocks noGrp="1" noChangeAspect="1"/>
           </p:cNvPicPr>
@@ -12584,7 +12586,7 @@
       </p:sp>
       <p:pic>
         <p:nvPicPr>
-          <p:cNvPr descr="analysis_of_variance_lecture_files/figure-pptx/unnamed-chunk-26-1.png" id="0" name="Picture 1"/>
+          <p:cNvPr descr="analysis_of_variance_lecture_files/figure-pptx/analysis-of-variance-26-1.png" id="0" name="Picture 1"/>
           <p:cNvPicPr>
             <a:picLocks noGrp="1" noChangeAspect="1"/>
           </p:cNvPicPr>
@@ -12712,7 +12714,7 @@
       </p:sp>
       <p:pic>
         <p:nvPicPr>
-          <p:cNvPr descr="analysis_of_variance_lecture_files/figure-pptx/unnamed-chunk-28-1.png" id="0" name="Picture 1"/>
+          <p:cNvPr descr="analysis_of_variance_lecture_files/figure-pptx/analysis-of-variance-28-1.png" id="0" name="Picture 1"/>
           <p:cNvPicPr>
             <a:picLocks noGrp="1" noChangeAspect="1"/>
           </p:cNvPicPr>
@@ -12840,7 +12842,7 @@
       </p:sp>
       <p:pic>
         <p:nvPicPr>
-          <p:cNvPr descr="analysis_of_variance_lecture_files/figure-pptx/unnamed-chunk-30-1.png" id="0" name="Picture 1"/>
+          <p:cNvPr descr="analysis_of_variance_lecture_files/figure-pptx/analysis-of-variance-30-1.png" id="0" name="Picture 1"/>
           <p:cNvPicPr>
             <a:picLocks noGrp="1" noChangeAspect="1"/>
           </p:cNvPicPr>
@@ -13065,7 +13067,15 @@
             </a:r>
             <a:r>
               <a:rPr/>
-              <a:t> H = test statistic (χ² approximation); df = k − 1 = 2; p = 0.0135 (significant at α = 0.05); conclusion: at least one group differs.</a:t>
+              <a:t> H = test statistic (χ² approximation); df = k − 1 = 2; </a:t>
+            </a:r>
+            <a:r>
+              <a:rPr b="1"/>
+              <a:t>p = 0.009</a:t>
+            </a:r>
+            <a:r>
+              <a:rPr/>
+              <a:t> (significant at α = 0.05); conclusion: at least one group differs.</a:t>
             </a:r>
           </a:p>
           <a:p>
@@ -13123,7 +13133,7 @@
       </p:sp>
       <p:pic>
         <p:nvPicPr>
-          <p:cNvPr descr="analysis_of_variance_lecture_files/figure-pptx/unnamed-chunk-33-1.png" id="0" name="Picture 1"/>
+          <p:cNvPr descr="analysis_of_variance_lecture_files/figure-pptx/analysis-of-variance-33-1.png" id="0" name="Picture 1"/>
           <p:cNvPicPr>
             <a:picLocks noGrp="1" noChangeAspect="1"/>
           </p:cNvPicPr>
@@ -13217,12 +13227,9 @@
         </p:nvSpPr>
         <p:spPr>
           <a:xfrm>
-            <a:off x="0" y="0"/>
-            <a:ext cx="9144000" cy="602780"/>
+            <a:off x="139485" y="78119"/>
+            <a:ext cx="8229600" cy="607682"/>
           </a:xfrm>
-          <a:solidFill>
-            <a:srgbClr val="70121D"/>
-          </a:solidFill>
         </p:spPr>
         <p:txBody>
           <a:bodyPr/>
@@ -13240,12 +13247,12 @@
       </p:sp>
       <p:sp>
         <p:nvSpPr>
-          <p:cNvPr id="3" name="Content Placeholder 2"/>
+          <p:cNvPr id="3" name="Text Placeholder 2"/>
           <p:cNvSpPr>
             <a:spLocks noGrp="1"/>
           </p:cNvSpPr>
           <p:nvPr>
-            <p:ph idx="1" sz="half"/>
+            <p:ph idx="1" type="body"/>
           </p:nvPr>
         </p:nvSpPr>
         <p:spPr/>
@@ -13396,18 +13403,279 @@
             </a:pPr>
             <a:r>
               <a:rPr b="1"/>
-              <a:t>Key observations:</a:t>
-            </a:r>
-            <a:r>
-              <a:rPr/>
-              <a:t> both tests still detect differences; Kruskal-Wallis is more robust to violations; the parametric test may give misleading results when assumptions are violated; the non-parametric test maintains validity.</a:t>
+              <a:t>This is the whole argument, in four numbers:</a:t>
+            </a:r>
+          </a:p>
+        </p:txBody>
+      </p:sp>
+      <p:graphicFrame>
+        <p:nvGraphicFramePr>
+          <p:cNvPr id="6" name="Content Placeholder 5"/>
+          <p:cNvGraphicFramePr>
+            <a:graphicFrameLocks noGrp="1"/>
+          </p:cNvGraphicFramePr>
+          <p:nvPr>
+            <p:ph idx="1"/>
+          </p:nvPr>
+        </p:nvGraphicFramePr>
+        <p:xfrm>
+          <a:off x="127000" y="1270000"/>
+          <a:ext cx="4432300" cy="3302000"/>
+        </p:xfrm>
+        <a:graphic>
+          <a:graphicData uri="http://schemas.openxmlformats.org/drawingml/2006/table">
+            <a:tbl>
+              <a:tblPr firstRow="1" bandRow="1">
+                <a:tableStyleId>{5C22544A-7EE6-4342-B048-85BDC9FD1C3A}</a:tableStyleId>
+              </a:tblPr>
+              <a:tblGrid>
+                <a:gridCol w="1473200"/>
+                <a:gridCol w="1473200"/>
+                <a:gridCol w="1473200"/>
+              </a:tblGrid>
+              <a:tr h="0">
+                <a:tc>
+                  <a:txBody>
+                    <a:bodyPr/>
+                    <a:lstStyle/>
+                    <a:p>
+                      <a:pPr lvl="0" indent="0" marL="0">
+                        <a:buNone/>
+                      </a:pPr>
+                      <a:r>
+                        <a:rPr/>
+                        <a:t>Data</a:t>
+                      </a:r>
+                    </a:p>
+                  </a:txBody>
+                  <a:tcPr/>
+                </a:tc>
+                <a:tc>
+                  <a:txBody>
+                    <a:bodyPr/>
+                    <a:lstStyle/>
+                    <a:p>
+                      <a:pPr lvl="0" indent="0" marL="0">
+                        <a:buNone/>
+                      </a:pPr>
+                      <a:r>
+                        <a:rPr/>
+                        <a:t>ANOVA (parametric)</a:t>
+                      </a:r>
+                    </a:p>
+                  </a:txBody>
+                  <a:tcPr/>
+                </a:tc>
+                <a:tc>
+                  <a:txBody>
+                    <a:bodyPr/>
+                    <a:lstStyle/>
+                    <a:p>
+                      <a:pPr lvl="0" indent="0" marL="0">
+                        <a:buNone/>
+                      </a:pPr>
+                      <a:r>
+                        <a:rPr/>
+                        <a:t>Kruskal-Wallis</a:t>
+                      </a:r>
+                    </a:p>
+                  </a:txBody>
+                  <a:tcPr/>
+                </a:tc>
+              </a:tr>
+              <a:tr h="0">
+                <a:tc>
+                  <a:txBody>
+                    <a:bodyPr/>
+                    <a:lstStyle/>
+                    <a:p>
+                      <a:pPr lvl="0" indent="0" marL="0">
+                        <a:buNone/>
+                      </a:pPr>
+                      <a:r>
+                        <a:rPr/>
+                        <a:t>Original</a:t>
+                      </a:r>
+                    </a:p>
+                  </a:txBody>
+                </a:tc>
+                <a:tc>
+                  <a:txBody>
+                    <a:bodyPr/>
+                    <a:lstStyle/>
+                    <a:p>
+                      <a:pPr lvl="0" indent="0" marL="0">
+                        <a:buNone/>
+                      </a:pPr>
+                      <a:r>
+                        <a:rPr/>
+                        <a:t>F = 7.29, </a:t>
+                      </a:r>
+                      <a:r>
+                        <a:rPr b="1"/>
+                        <a:t>p = 0.004</a:t>
+                      </a:r>
+                      <a:r>
+                        <a:rPr/>
+                        <a:t> ✅</a:t>
+                      </a:r>
+                    </a:p>
+                  </a:txBody>
+                </a:tc>
+                <a:tc>
+                  <a:txBody>
+                    <a:bodyPr/>
+                    <a:lstStyle/>
+                    <a:p>
+                      <a:pPr lvl="0" indent="0" marL="0">
+                        <a:buNone/>
+                      </a:pPr>
+                      <a:r>
+                        <a:rPr/>
+                        <a:t>H = 9.42, </a:t>
+                      </a:r>
+                      <a:r>
+                        <a:rPr b="1"/>
+                        <a:t>p = 0.009</a:t>
+                      </a:r>
+                      <a:r>
+                        <a:rPr/>
+                        <a:t> ✅</a:t>
+                      </a:r>
+                    </a:p>
+                  </a:txBody>
+                </a:tc>
+              </a:tr>
+              <a:tr h="0">
+                <a:tc>
+                  <a:txBody>
+                    <a:bodyPr/>
+                    <a:lstStyle/>
+                    <a:p>
+                      <a:pPr lvl="0" indent="0" marL="0">
+                        <a:buNone/>
+                      </a:pPr>
+                      <a:r>
+                        <a:rPr/>
+                        <a:t>Violated</a:t>
+                      </a:r>
+                    </a:p>
+                  </a:txBody>
+                </a:tc>
+                <a:tc>
+                  <a:txBody>
+                    <a:bodyPr/>
+                    <a:lstStyle/>
+                    <a:p>
+                      <a:pPr lvl="0" indent="0" marL="0">
+                        <a:buNone/>
+                      </a:pPr>
+                      <a:r>
+                        <a:rPr/>
+                        <a:t>F = 2.84, </a:t>
+                      </a:r>
+                      <a:r>
+                        <a:rPr b="1"/>
+                        <a:t>p = 0.084</a:t>
+                      </a:r>
+                      <a:r>
+                        <a:rPr/>
+                        <a:t> ❌</a:t>
+                      </a:r>
+                    </a:p>
+                  </a:txBody>
+                </a:tc>
+                <a:tc>
+                  <a:txBody>
+                    <a:bodyPr/>
+                    <a:lstStyle/>
+                    <a:p>
+                      <a:pPr lvl="0" indent="0" marL="0">
+                        <a:buNone/>
+                      </a:pPr>
+                      <a:r>
+                        <a:rPr/>
+                        <a:t>H = 6.85, </a:t>
+                      </a:r>
+                      <a:r>
+                        <a:rPr b="1"/>
+                        <a:t>p = 0.033</a:t>
+                      </a:r>
+                      <a:r>
+                        <a:rPr/>
+                        <a:t> ✅</a:t>
+                      </a:r>
+                    </a:p>
+                  </a:txBody>
+                </a:tc>
+              </a:tr>
+            </a:tbl>
+          </a:graphicData>
+        </a:graphic>
+      </p:graphicFrame>
+      <p:sp>
+        <p:nvSpPr>
+          <p:cNvPr id="4" name="Content Placeholder 3"/>
+          <p:cNvSpPr>
+            <a:spLocks noGrp="1"/>
+          </p:cNvSpPr>
+          <p:nvPr>
+            <p:ph idx="2" sz="half"/>
+          </p:nvPr>
+        </p:nvSpPr>
+        <p:spPr/>
+        <p:txBody>
+          <a:bodyPr/>
+          <a:lstStyle/>
+          <a:p>
+            <a:pPr lvl="0" indent="0" marL="1270000">
+              <a:buNone/>
+            </a:pPr>
+            <a:r>
+              <a:rPr sz="2000" b="1"/>
+              <a:t>Important</a:t>
+            </a:r>
+          </a:p>
+          <a:p>
+            <a:pPr lvl="0" indent="0" marL="1270000">
+              <a:buNone/>
+            </a:pPr>
+            <a:r>
+              <a:rPr sz="2000" b="1"/>
+              <a:t>The parametric test lost the effect. The rank test kept it.</a:t>
+            </a:r>
+          </a:p>
+          <a:p>
+            <a:pPr lvl="0" indent="0" marL="1270000">
+              <a:buNone/>
+            </a:pPr>
+            <a:r>
+              <a:rPr sz="2000"/>
+              <a:t>Nothing about the biology changed — we only inflated one group’s variance and pushed two points out into the tail. That was enough to drag the F-test’s p-value from 0.004 to 0.084, across the α = 0.05 line.</a:t>
+            </a:r>
+          </a:p>
+          <a:p>
+            <a:pPr lvl="0" indent="0" marL="1270000">
+              <a:buNone/>
+            </a:pPr>
+            <a:r>
+              <a:rPr sz="2000"/>
+              <a:t>Kruskal-Wallis barely noticed, because ranks don’t care </a:t>
+            </a:r>
+            <a:r>
+              <a:rPr sz="2000" i="1"/>
+              <a:t>how far</a:t>
+            </a:r>
+            <a:r>
+              <a:rPr sz="2000"/>
+              <a:t> out an outlier is, only that it is out there.</a:t>
             </a:r>
           </a:p>
         </p:txBody>
       </p:sp>
       <p:pic>
         <p:nvPicPr>
-          <p:cNvPr descr="analysis_of_variance_lecture_files/figure-pptx/unnamed-chunk-37-1.png" id="0" name="Picture 1"/>
+          <p:cNvPr descr="analysis_of_variance_lecture_files/figure-pptx/analysis-of-variance-37-1.png" id="0" name="Picture 1"/>
           <p:cNvPicPr>
             <a:picLocks noGrp="1" noChangeAspect="1"/>
           </p:cNvPicPr>
@@ -13421,8 +13689,8 @@
         </p:blipFill>
         <p:spPr bwMode="auto">
           <a:xfrm>
-            <a:off x="6121400" y="1765300"/>
-            <a:ext cx="2781300" cy="2260600"/>
+            <a:off x="4749800" y="1295400"/>
+            <a:ext cx="4038600" cy="3276600"/>
           </a:xfrm>
           <a:prstGeom prst="rect">
             <a:avLst/>
@@ -13435,6 +13703,35 @@
           </a:ln>
         </p:spPr>
       </p:pic>
+      <p:sp>
+        <p:nvSpPr>
+          <p:cNvPr id="6" name="Content Placeholder 5"/>
+          <p:cNvSpPr>
+            <a:spLocks noGrp="1"/>
+          </p:cNvSpPr>
+          <p:nvPr>
+            <p:ph idx="4" sz="quarter"/>
+          </p:nvPr>
+        </p:nvSpPr>
+        <p:spPr/>
+        <p:txBody>
+          <a:bodyPr/>
+          <a:lstStyle/>
+          <a:p>
+            <a:pPr lvl="0" indent="0" marL="0">
+              <a:buNone/>
+            </a:pPr>
+            <a:r>
+              <a:rPr b="1"/>
+              <a:t>Why Kruskal-Wallis is robust:</a:t>
+            </a:r>
+            <a:r>
+              <a:rPr/>
+              <a:t> uses ranks instead of raw values, outliers affect ranks minimally, unequal variances are less problematic, no distribution assumptions are needed.</a:t>
+            </a:r>
+          </a:p>
+        </p:txBody>
+      </p:sp>
     </p:spTree>
   </p:cSld>
 </p:sld>
@@ -13540,7 +13837,7 @@
             </a:r>
             <a:r>
               <a:rPr/>
-              <a:t> Control vs Eyes: p = 0.024 (significant); Control vs Knees: p = 1.000 (not significant); Eyes vs Knees: p = 0.078 (not significant).</a:t>
+              <a:t> Control vs Eyes: p = 0.004 (significant); Control vs Knees: p = 1.000 (not significant); Eyes vs Knees: p = 0.079 (not significant).</a:t>
             </a:r>
           </a:p>
           <a:p>
@@ -13818,24 +14115,12 @@
               <a:rPr>
                 <a:latin typeface="Courier"/>
               </a:rPr>
-              <a:t>Original Data Pairwise p-values:
-   Control vs Eyes:  0.024 *
-   Control vs Knees: 1.000
-   Eyes vs Knees:    0.078</a:t>
-            </a:r>
-          </a:p>
-          <a:p>
-            <a:pPr lvl="0" indent="0">
-              <a:buNone/>
-            </a:pPr>
-            <a:r>
-              <a:rPr>
-                <a:latin typeface="Courier"/>
-              </a:rPr>
-              <a:t>Violated Data Pairwise p-values:
-   Control vs Eyes:  0.015 *
-   Control vs Knees: 1.000
-   Eyes vs Knees:    0.015 *</a:t>
+              <a:t># A tibble: 3 × 3
+  comparison       original_data violated_data
+  &lt;chr&gt;                    &lt;dbl&gt;         &lt;dbl&gt;
+1 Control vs Eyes         0.0037        0.0037
+2 Control vs Knees        1             1     
+3 Eyes vs Knees           0.0787        1     </a:t>
             </a:r>
           </a:p>
         </p:txBody>
@@ -14518,48 +14803,313 @@
           </a:p>
         </p:txBody>
       </p:sp>
-      <p:sp>
-        <p:nvSpPr>
-          <p:cNvPr id="3" name="Content Placeholder 2"/>
-          <p:cNvSpPr>
-            <a:spLocks noGrp="1"/>
-          </p:cNvSpPr>
-          <p:nvPr>
-            <p:ph idx="1" sz="half"/>
-          </p:nvPr>
-        </p:nvSpPr>
-        <p:spPr/>
-        <p:txBody>
-          <a:bodyPr/>
-          <a:lstStyle/>
-          <a:p>
-            <a:pPr lvl="0" indent="0" marL="0">
-              <a:buNone/>
-            </a:pPr>
-            <a:r>
-              <a:rPr b="1"/>
-              <a:t>Essential elements to include:</a:t>
-            </a:r>
-            <a:r>
-              <a:rPr/>
-              <a:t> test name and purpose, sample sizes per group, medians and IQRs (not means and SDs!), test statistic (H) and degrees of freedom, p-value, effect size, post-hoc test results, conclusion.</a:t>
-            </a:r>
-          </a:p>
-          <a:p>
-            <a:pPr lvl="0" indent="0" marL="0">
-              <a:buNone/>
-            </a:pPr>
-            <a:r>
-              <a:rPr b="1"/>
-              <a:t>Example write-up:</a:t>
-            </a:r>
-            <a:r>
-              <a:rPr/>
-              <a:t> “A Kruskal-Wallis test was conducted to compare the effect of light treatment on circadian rhythm phase shift across three groups: Control (n = 8), Knees (n = 7), and Eyes (n = 7). Median phase shifts were −0.48 hours (IQR = 0.84) for Control, −0.29 hours (IQR = 1.04) for Knees, and −1.48 hours (IQR = 0.66) for Eyes. The test revealed a statistically significant difference in phase shift between the groups, H(2) = 8.66, p = 0.013, ε² = 0.37. Post-hoc pairwise comparisons using Dunn’s test with Bonferroni correction indicated that the Eyes treatment differed significantly from Control (p = 0.024), but no other pairwise differences were significant.”</a:t>
-            </a:r>
-          </a:p>
-        </p:txBody>
-      </p:sp>
+      <mc:AlternateContent xmlns:mc="http://schemas.openxmlformats.org/markup-compatibility/2006">
+        <mc:Choice xmlns:a14="http://schemas.microsoft.com/office/drawing/2010/main" Requires="a14">
+          <p:sp>
+            <p:nvSpPr>
+              <p:cNvPr id="3" name="Content Placeholder 2"/>
+              <p:cNvSpPr>
+                <a:spLocks noGrp="1"/>
+              </p:cNvSpPr>
+              <p:nvPr>
+                <p:ph idx="1" sz="half"/>
+              </p:nvPr>
+            </p:nvSpPr>
+            <p:spPr/>
+            <p:txBody>
+              <a:bodyPr/>
+              <a:lstStyle/>
+              <a:p>
+                <a:pPr lvl="0" indent="0" marL="0">
+                  <a:buNone/>
+                </a:pPr>
+                <a:r>
+                  <a:rPr b="1"/>
+                  <a:t>Essential elements to include:</a:t>
+                </a:r>
+                <a:r>
+                  <a:rPr/>
+                  <a:t> test name and purpose, sample sizes per group, medians and IQRs (not means and SDs!), test statistic (H) and degrees of freedom, p-value, effect size, post-hoc test results, conclusion.</a:t>
+                </a:r>
+              </a:p>
+              <a:p>
+                <a:pPr lvl="0" indent="0" marL="0">
+                  <a:buNone/>
+                </a:pPr>
+                <a:r>
+                  <a:rPr b="1"/>
+                  <a:t>Example write-up:</a:t>
+                </a:r>
+                <a:r>
+                  <a:rPr/>
+                  <a:t> “A Kruskal-Wallis test was conducted to compare the effect of light treatment on circadian rhythm phase shift across three groups: Control (n = 8), Knees (n = 7), and Eyes (n = 7). Median phase shifts were −0.48 hours (IQR = 0.89) for Control, −0.29 hours (IQR = 0.93) for Knees, and −1.48 hours (IQR = 0.68) for Eyes. The test revealed a statistically significant difference in phase shift between the groups, H(2) = 9.42, p = 0.009, ε² = 0.45. Post-hoc pairwise comparisons using Dunn’s test with Bonferroni correction indicated that the Eyes treatment differed significantly from both Control (p = 0.016) and Knees (p = 0.032), while Control and Knees did not differ (p = 1.000).”</a:t>
+                </a:r>
+              </a:p>
+              <a:p>
+                <a:pPr lvl="0" indent="0" marL="1270000">
+                  <a:buNone/>
+                </a:pPr>
+                <a:r>
+                  <a:rPr sz="2000" b="1"/>
+                  <a:t>Note</a:t>
+                </a:r>
+              </a:p>
+              <a:p>
+                <a:pPr lvl="0" indent="0" marL="1270000">
+                  <a:buNone/>
+                </a:pPr>
+                <a:r>
+                  <a:rPr sz="2000" b="1"/>
+                  <a:t>📖 Where ε² comes from</a:t>
+                </a:r>
+              </a:p>
+              <a:p>
+                <a:pPr lvl="0" indent="0" marL="1270000">
+                  <a:buNone/>
+                </a:pPr>
+                <a14:m>
+                  <m:oMathPara xmlns:m="http://schemas.openxmlformats.org/officeDocument/2006/math">
+                    <m:oMathParaPr>
+                      <m:jc m:val="center"/>
+                    </m:oMathParaPr>
+                    <m:oMath>
+                      <m:sSup>
+                        <m:e>
+                          <m:r>
+                            <m:t>ε</m:t>
+                          </m:r>
+                        </m:e>
+                        <m:sup>
+                          <m:r>
+                            <m:t>2</m:t>
+                          </m:r>
+                        </m:sup>
+                      </m:sSup>
+                      <m:r>
+                        <m:rPr>
+                          <m:sty m:val="p"/>
+                        </m:rPr>
+                        <m:t>=</m:t>
+                      </m:r>
+                      <m:f>
+                        <m:fPr>
+                          <m:type m:val="bar"/>
+                        </m:fPr>
+                        <m:num>
+                          <m:r>
+                            <m:t>H</m:t>
+                          </m:r>
+                        </m:num>
+                        <m:den>
+                          <m:r>
+                            <m:rPr>
+                              <m:sty m:val="p"/>
+                            </m:rPr>
+                            <m:t>(</m:t>
+                          </m:r>
+                          <m:sSup>
+                            <m:e>
+                              <m:r>
+                                <m:t>n</m:t>
+                              </m:r>
+                            </m:e>
+                            <m:sup>
+                              <m:r>
+                                <m:t>2</m:t>
+                              </m:r>
+                            </m:sup>
+                          </m:sSup>
+                          <m:r>
+                            <m:rPr>
+                              <m:sty m:val="p"/>
+                            </m:rPr>
+                            <m:t>−</m:t>
+                          </m:r>
+                          <m:r>
+                            <m:t>1</m:t>
+                          </m:r>
+                          <m:r>
+                            <m:rPr>
+                              <m:sty m:val="p"/>
+                            </m:rPr>
+                            <m:t>)</m:t>
+                          </m:r>
+                          <m:r>
+                            <m:rPr>
+                              <m:sty m:val="p"/>
+                            </m:rPr>
+                            <m:t>/</m:t>
+                          </m:r>
+                          <m:r>
+                            <m:rPr>
+                              <m:sty m:val="p"/>
+                            </m:rPr>
+                            <m:t>(</m:t>
+                          </m:r>
+                          <m:r>
+                            <m:t>n</m:t>
+                          </m:r>
+                          <m:r>
+                            <m:rPr>
+                              <m:sty m:val="p"/>
+                            </m:rPr>
+                            <m:t>+</m:t>
+                          </m:r>
+                          <m:r>
+                            <m:t>1</m:t>
+                          </m:r>
+                          <m:r>
+                            <m:rPr>
+                              <m:sty m:val="p"/>
+                            </m:rPr>
+                            <m:t>)</m:t>
+                          </m:r>
+                        </m:den>
+                      </m:f>
+                    </m:oMath>
+                  </m:oMathPara>
+                </a14:m>
+              </a:p>
+              <a:p>
+                <a:pPr lvl="0" indent="0" marL="1270000">
+                  <a:buNone/>
+                </a:pPr>
+                <a:r>
+                  <a:rPr sz="2000"/>
+                  <a:t>Here </a:t>
+                </a:r>
+                <a14:m>
+                  <m:oMath xmlns:m="http://schemas.openxmlformats.org/officeDocument/2006/math">
+                    <m:r>
+                      <m:t>9.42</m:t>
+                    </m:r>
+                    <m:r>
+                      <m:rPr>
+                        <m:sty m:val="p"/>
+                      </m:rPr>
+                      <m:t>/</m:t>
+                    </m:r>
+                    <m:r>
+                      <m:t>21</m:t>
+                    </m:r>
+                    <m:r>
+                      <m:rPr>
+                        <m:sty m:val="p"/>
+                      </m:rPr>
+                      <m:t>=</m:t>
+                    </m:r>
+                    <m:r>
+                      <m:t>0.45</m:t>
+                    </m:r>
+                  </m:oMath>
+                </a14:m>
+                <a:r>
+                  <a:rPr sz="2000"/>
+                  <a:t> — the rank-based analogue of R². Watch out: some software reports </a:t>
+                </a:r>
+                <a14:m>
+                  <m:oMath xmlns:m="http://schemas.openxmlformats.org/officeDocument/2006/math">
+                    <m:sSubSup>
+                      <m:e>
+                        <m:r>
+                          <m:t>η</m:t>
+                        </m:r>
+                      </m:e>
+                      <m:sub>
+                        <m:r>
+                          <m:t>H</m:t>
+                        </m:r>
+                      </m:sub>
+                      <m:sup>
+                        <m:r>
+                          <m:t>2</m:t>
+                        </m:r>
+                      </m:sup>
+                    </m:sSubSup>
+                    <m:r>
+                      <m:rPr>
+                        <m:sty m:val="p"/>
+                      </m:rPr>
+                      <m:t>=</m:t>
+                    </m:r>
+                    <m:r>
+                      <m:rPr>
+                        <m:sty m:val="p"/>
+                      </m:rPr>
+                      <m:t>(</m:t>
+                    </m:r>
+                    <m:r>
+                      <m:t>H</m:t>
+                    </m:r>
+                    <m:r>
+                      <m:rPr>
+                        <m:sty m:val="p"/>
+                      </m:rPr>
+                      <m:t>−</m:t>
+                    </m:r>
+                    <m:r>
+                      <m:t>k</m:t>
+                    </m:r>
+                    <m:r>
+                      <m:rPr>
+                        <m:sty m:val="p"/>
+                      </m:rPr>
+                      <m:t>+</m:t>
+                    </m:r>
+                    <m:r>
+                      <m:t>1</m:t>
+                    </m:r>
+                    <m:r>
+                      <m:rPr>
+                        <m:sty m:val="p"/>
+                      </m:rPr>
+                      <m:t>)</m:t>
+                    </m:r>
+                    <m:r>
+                      <m:rPr>
+                        <m:sty m:val="p"/>
+                      </m:rPr>
+                      <m:t>/</m:t>
+                    </m:r>
+                    <m:r>
+                      <m:rPr>
+                        <m:sty m:val="p"/>
+                      </m:rPr>
+                      <m:t>(</m:t>
+                    </m:r>
+                    <m:r>
+                      <m:t>n</m:t>
+                    </m:r>
+                    <m:r>
+                      <m:rPr>
+                        <m:sty m:val="p"/>
+                      </m:rPr>
+                      <m:t>−</m:t>
+                    </m:r>
+                    <m:r>
+                      <m:t>k</m:t>
+                    </m:r>
+                    <m:r>
+                      <m:rPr>
+                        <m:sty m:val="p"/>
+                      </m:rPr>
+                      <m:t>)</m:t>
+                    </m:r>
+                  </m:oMath>
+                </a14:m>
+                <a:r>
+                  <a:rPr sz="2000"/>
+                  <a:t> instead, which gives 0.39 for these data. </a:t>
+                </a:r>
+                <a:r>
+                  <a:rPr sz="2000" b="1"/>
+                  <a:t>Say which one you used.</a:t>
+                </a:r>
+              </a:p>
+            </p:txBody>
+          </p:sp>
+        </mc:Choice>
+      </mc:AlternateContent>
       <p:sp>
         <p:nvSpPr>
           <p:cNvPr id="4" name="Content Placeholder 3"/>
@@ -14589,7 +15139,7 @@
             </a:pPr>
             <a:r>
               <a:rPr sz="2000"/>
-              <a:t>The Kruskal-Wallis test revealed significant differences between treatment groups, H(2) = 8.66, p = .013.</a:t>
+              <a:t>The Kruskal-Wallis test revealed significant differences between treatment groups, H(2) = 9.42, p = .009.</a:t>
             </a:r>
           </a:p>
           <a:p>
@@ -14709,7 +15259,7 @@
               </a:rPr>
               <a:t>Table 1. Descriptive Statistics for Phase Shift by Treatment
 Note. IQR = interquartile range.
- Kruskal-Wallis H(2) = 8.66, p = .013</a:t>
+Kruskal-Wallis H(2) = 9.42, p = 0.009</a:t>
             </a:r>
           </a:p>
           <a:p>
@@ -14726,6 +15276,720 @@
 1 Control       8 -0.485 0.89  -1.27  0.53
 2 Eyes          7 -1.48  0.675 -2.83 -0.78
 3 Knees         7 -0.29  0.93  -1.61  0.73</a:t>
+            </a:r>
+          </a:p>
+        </p:txBody>
+      </p:sp>
+    </p:spTree>
+  </p:cSld>
+</p:sld>
+</file>
+
+<file path=ppt/slides/slide53.xml><?xml version="1.0" encoding="utf-8"?>
+<p:sld xmlns:a="http://schemas.openxmlformats.org/drawingml/2006/main" xmlns:r="http://schemas.openxmlformats.org/officeDocument/2006/relationships" xmlns:p="http://schemas.openxmlformats.org/presentationml/2006/main">
+  <p:cSld>
+    <p:spTree>
+      <p:nvGrpSpPr>
+        <p:cNvPr id="1" name=""/>
+        <p:cNvGrpSpPr/>
+        <p:nvPr/>
+      </p:nvGrpSpPr>
+      <p:grpSpPr>
+        <a:xfrm>
+          <a:off x="0" y="0"/>
+          <a:ext cx="0" cy="0"/>
+          <a:chOff x="0" y="0"/>
+          <a:chExt cx="0" cy="0"/>
+        </a:xfrm>
+      </p:grpSpPr>
+      <p:sp>
+        <p:nvSpPr>
+          <p:cNvPr id="2" name="Title 1"/>
+          <p:cNvSpPr>
+            <a:spLocks noGrp="1"/>
+          </p:cNvSpPr>
+          <p:nvPr>
+            <p:ph type="title"/>
+          </p:nvPr>
+        </p:nvSpPr>
+        <p:spPr>
+          <a:xfrm>
+            <a:off x="0" y="0"/>
+            <a:ext cx="9144000" cy="602780"/>
+          </a:xfrm>
+          <a:solidFill>
+            <a:srgbClr val="70121D"/>
+          </a:solidFill>
+        </p:spPr>
+        <p:txBody>
+          <a:bodyPr/>
+          <a:lstStyle/>
+          <a:p>
+            <a:pPr lvl="0" indent="0" marL="0">
+              <a:buNone/>
+            </a:pPr>
+            <a:r>
+              <a:rPr/>
+              <a:t>Wrap-up</a:t>
+            </a:r>
+          </a:p>
+        </p:txBody>
+      </p:sp>
+      <mc:AlternateContent xmlns:mc="http://schemas.openxmlformats.org/markup-compatibility/2006">
+        <mc:Choice xmlns:a14="http://schemas.microsoft.com/office/drawing/2010/main" Requires="a14">
+          <p:sp>
+            <p:nvSpPr>
+              <p:cNvPr id="3" name="Content Placeholder 2"/>
+              <p:cNvSpPr>
+                <a:spLocks noGrp="1"/>
+              </p:cNvSpPr>
+              <p:nvPr>
+                <p:ph idx="1" sz="half"/>
+              </p:nvPr>
+            </p:nvSpPr>
+            <p:spPr/>
+            <p:txBody>
+              <a:bodyPr/>
+              <a:lstStyle/>
+              <a:p>
+                <a:pPr lvl="0" indent="0" marL="0">
+                  <a:buNone/>
+                </a:pPr>
+                <a:r>
+                  <a:rPr/>
+                  <a:t>Today you:</a:t>
+                </a:r>
+              </a:p>
+              <a:p>
+                <a:pPr lvl="0"/>
+                <a:r>
+                  <a:rPr/>
+                  <a:t>Saw that </a:t>
+                </a:r>
+                <a:r>
+                  <a:rPr b="1"/>
+                  <a:t>ANOVA </a:t>
+                </a:r>
+                <a:r>
+                  <a:rPr b="1" i="1"/>
+                  <a:t>is</a:t>
+                </a:r>
+                <a:r>
+                  <a:rPr b="1"/>
+                  <a:t> regression</a:t>
+                </a:r>
+                <a:r>
+                  <a:rPr/>
+                  <a:t> with a categorical predictor — same partitioning, same F-ratio, different-looking output</a:t>
+                </a:r>
+              </a:p>
+              <a:p>
+                <a:pPr lvl="0"/>
+                <a:r>
+                  <a:rPr/>
+                  <a:t>Split </a:t>
+                </a:r>
+                <a14:m>
+                  <m:oMath xmlns:m="http://schemas.openxmlformats.org/officeDocument/2006/math">
+                    <m:r>
+                      <m:t>S</m:t>
+                    </m:r>
+                    <m:sSub>
+                      <m:e>
+                        <m:r>
+                          <m:t>S</m:t>
+                        </m:r>
+                      </m:e>
+                      <m:sub>
+                        <m:r>
+                          <m:t>t</m:t>
+                        </m:r>
+                        <m:r>
+                          <m:t>o</m:t>
+                        </m:r>
+                        <m:r>
+                          <m:t>t</m:t>
+                        </m:r>
+                        <m:r>
+                          <m:t>a</m:t>
+                        </m:r>
+                        <m:r>
+                          <m:t>l</m:t>
+                        </m:r>
+                      </m:sub>
+                    </m:sSub>
+                  </m:oMath>
+                </a14:m>
+                <a:r>
+                  <a:rPr/>
+                  <a:t> into </a:t>
+                </a:r>
+                <a14:m>
+                  <m:oMath xmlns:m="http://schemas.openxmlformats.org/officeDocument/2006/math">
+                    <m:r>
+                      <m:t>S</m:t>
+                    </m:r>
+                    <m:sSub>
+                      <m:e>
+                        <m:r>
+                          <m:t>S</m:t>
+                        </m:r>
+                      </m:e>
+                      <m:sub>
+                        <m:r>
+                          <m:t>a</m:t>
+                        </m:r>
+                        <m:r>
+                          <m:t>m</m:t>
+                        </m:r>
+                        <m:r>
+                          <m:t>o</m:t>
+                        </m:r>
+                        <m:r>
+                          <m:t>n</m:t>
+                        </m:r>
+                        <m:r>
+                          <m:t>g</m:t>
+                        </m:r>
+                      </m:sub>
+                    </m:sSub>
+                  </m:oMath>
+                </a14:m>
+                <a:r>
+                  <a:rPr/>
+                  <a:t> and </a:t>
+                </a:r>
+                <a14:m>
+                  <m:oMath xmlns:m="http://schemas.openxmlformats.org/officeDocument/2006/math">
+                    <m:r>
+                      <m:t>S</m:t>
+                    </m:r>
+                    <m:sSub>
+                      <m:e>
+                        <m:r>
+                          <m:t>S</m:t>
+                        </m:r>
+                      </m:e>
+                      <m:sub>
+                        <m:r>
+                          <m:t>w</m:t>
+                        </m:r>
+                        <m:r>
+                          <m:t>i</m:t>
+                        </m:r>
+                        <m:r>
+                          <m:t>t</m:t>
+                        </m:r>
+                        <m:r>
+                          <m:t>h</m:t>
+                        </m:r>
+                        <m:r>
+                          <m:t>i</m:t>
+                        </m:r>
+                        <m:r>
+                          <m:t>n</m:t>
+                        </m:r>
+                      </m:sub>
+                    </m:sSub>
+                  </m:oMath>
+                </a14:m>
+                <a:r>
+                  <a:rPr/>
+                  <a:t>, and turned them into mean squares</a:t>
+                </a:r>
+              </a:p>
+              <a:p>
+                <a:pPr lvl="0"/>
+                <a:r>
+                  <a:rPr/>
+                  <a:t>Built the </a:t>
+                </a:r>
+                <a:r>
+                  <a:rPr b="1"/>
+                  <a:t>F-ratio</a:t>
+                </a:r>
+                <a:r>
+                  <a:rPr/>
+                  <a:t> as signal ÷ noise, and confirmed that with two groups </a:t>
+                </a:r>
+                <a:r>
+                  <a:rPr b="1"/>
+                  <a:t>F = t²</a:t>
+                </a:r>
+                <a:r>
+                  <a:rPr/>
+                  <a:t> exactly</a:t>
+                </a:r>
+              </a:p>
+              <a:p>
+                <a:pPr lvl="0"/>
+                <a:r>
+                  <a:rPr/>
+                  <a:t>Checked the assumptions — Levene’s for equal variance, Shapiro-Wilk on the </a:t>
+                </a:r>
+                <a:r>
+                  <a:rPr b="1"/>
+                  <a:t>residuals</a:t>
+                </a:r>
+                <a:r>
+                  <a:rPr/>
+                  <a:t>, and the four diagnostic plots</a:t>
+                </a:r>
+              </a:p>
+              <a:p>
+                <a:pPr lvl="0"/>
+                <a:r>
+                  <a:rPr/>
+                  <a:t>Used </a:t>
+                </a:r>
+                <a:r>
+                  <a:rPr b="1"/>
+                  <a:t>Tukey’s HSD</a:t>
+                </a:r>
+                <a:r>
+                  <a:rPr/>
+                  <a:t> to find </a:t>
+                </a:r>
+                <a:r>
+                  <a:rPr i="1"/>
+                  <a:t>which</a:t>
+                </a:r>
+                <a:r>
+                  <a:rPr/>
+                  <a:t> groups differ, after the omnibus test said </a:t>
+                </a:r>
+                <a:r>
+                  <a:rPr i="1"/>
+                  <a:t>some</a:t>
+                </a:r>
+                <a:r>
+                  <a:rPr/>
+                  <a:t> group does</a:t>
+                </a:r>
+              </a:p>
+              <a:p>
+                <a:pPr lvl="0"/>
+                <a:r>
+                  <a:rPr/>
+                  <a:t>Reported the result the way a journal expects, with an effect size</a:t>
+                </a:r>
+              </a:p>
+              <a:p>
+                <a:pPr lvl="0"/>
+                <a:r>
+                  <a:rPr/>
+                  <a:t>Switched to </a:t>
+                </a:r>
+                <a:r>
+                  <a:rPr b="1"/>
+                  <a:t>Kruskal-Wallis</a:t>
+                </a:r>
+                <a:r>
+                  <a:rPr/>
+                  <a:t> and </a:t>
+                </a:r>
+                <a:r>
+                  <a:rPr b="1"/>
+                  <a:t>Dunn’s test</a:t>
+                </a:r>
+                <a:r>
+                  <a:rPr/>
+                  <a:t> when assumptions fail</a:t>
+                </a:r>
+              </a:p>
+              <a:p>
+                <a:pPr lvl="0" indent="0" marL="1270000">
+                  <a:buNone/>
+                </a:pPr>
+                <a:r>
+                  <a:rPr sz="2000" b="1"/>
+                  <a:t>Important</a:t>
+                </a:r>
+              </a:p>
+              <a:p>
+                <a:pPr lvl="0" indent="0" marL="1270000">
+                  <a:buNone/>
+                </a:pPr>
+                <a:r>
+                  <a:rPr sz="2000" b="1"/>
+                  <a:t>⚠️ The order matters</a:t>
+                </a:r>
+              </a:p>
+              <a:p>
+                <a:pPr lvl="0" indent="0" marL="1270000">
+                  <a:buNone/>
+                </a:pPr>
+                <a:r>
+                  <a:rPr sz="2000"/>
+                  <a:t>A significant F says </a:t>
+                </a:r>
+                <a:r>
+                  <a:rPr sz="2000" i="1"/>
+                  <a:t>at least one</a:t>
+                </a:r>
+                <a:r>
+                  <a:rPr sz="2000"/>
+                  <a:t> group differs — it does not say which. Post-hoc tests answer that, and they only make sense </a:t>
+                </a:r>
+                <a:r>
+                  <a:rPr sz="2000" b="1"/>
+                  <a:t>after</a:t>
+                </a:r>
+                <a:r>
+                  <a:rPr sz="2000"/>
+                  <a:t> a significant omnibus test. Running all pairwise t-tests instead inflates your Type I error with every comparison.</a:t>
+                </a:r>
+              </a:p>
+            </p:txBody>
+          </p:sp>
+        </mc:Choice>
+      </mc:AlternateContent>
+      <p:sp>
+        <p:nvSpPr>
+          <p:cNvPr id="4" name="Content Placeholder 3"/>
+          <p:cNvSpPr>
+            <a:spLocks noGrp="1"/>
+          </p:cNvSpPr>
+          <p:nvPr>
+            <p:ph idx="2" sz="half"/>
+          </p:nvPr>
+        </p:nvSpPr>
+        <p:spPr/>
+        <p:txBody>
+          <a:bodyPr/>
+          <a:lstStyle/>
+          <a:p>
+            <a:pPr lvl="0" indent="0" marL="1270000">
+              <a:buNone/>
+            </a:pPr>
+            <a:r>
+              <a:rPr sz="2000" b="1"/>
+              <a:t>Note</a:t>
+            </a:r>
+          </a:p>
+          <a:p>
+            <a:pPr lvl="0" indent="0" marL="1270000">
+              <a:buNone/>
+            </a:pPr>
+            <a:r>
+              <a:rPr sz="2000" b="1"/>
+              <a:t>✅ The one idea to keep</a:t>
+            </a:r>
+          </a:p>
+          <a:p>
+            <a:pPr lvl="0" indent="0" marL="1270000">
+              <a:buNone/>
+            </a:pPr>
+            <a:r>
+              <a:rPr sz="2000"/>
+              <a:t>We deliberately broke the assumptions and watched the parametric p-value slide from </a:t>
+            </a:r>
+            <a:r>
+              <a:rPr sz="2000" b="1"/>
+              <a:t>0.004 to 0.084</a:t>
+            </a:r>
+            <a:r>
+              <a:rPr sz="2000"/>
+              <a:t> while the rank-based one held at </a:t>
+            </a:r>
+            <a:r>
+              <a:rPr sz="2000" b="1"/>
+              <a:t>0.033</a:t>
+            </a:r>
+            <a:r>
+              <a:rPr sz="2000"/>
+              <a:t>.</a:t>
+            </a:r>
+          </a:p>
+          <a:p>
+            <a:pPr lvl="0" indent="0" marL="1270000">
+              <a:buNone/>
+            </a:pPr>
+            <a:r>
+              <a:rPr sz="2000"/>
+              <a:t>The data’s biology never changed. Only its shape did. That is what “assumption violation” costs you, in one number.</a:t>
+            </a:r>
+          </a:p>
+          <a:p>
+            <a:pPr lvl="0" indent="0" marL="1270000">
+              <a:buNone/>
+            </a:pPr>
+            <a:r>
+              <a:rPr sz="2000" b="1"/>
+              <a:t>Note</a:t>
+            </a:r>
+          </a:p>
+          <a:p>
+            <a:pPr lvl="0" indent="0" marL="1270000">
+              <a:buNone/>
+            </a:pPr>
+            <a:r>
+              <a:rPr sz="2000" b="1"/>
+              <a:t>Up next — Two-Way ANOVA</a:t>
+            </a:r>
+          </a:p>
+          <a:p>
+            <a:pPr lvl="0"/>
+            <a:r>
+              <a:rPr sz="2000"/>
+              <a:t>Two categorical predictors at once</a:t>
+            </a:r>
+          </a:p>
+          <a:p>
+            <a:pPr lvl="0"/>
+            <a:r>
+              <a:rPr sz="2000"/>
+              <a:t>Interaction: when the effect of one factor depends on the other</a:t>
+            </a:r>
+          </a:p>
+        </p:txBody>
+      </p:sp>
+    </p:spTree>
+  </p:cSld>
+</p:sld>
+</file>
+
+<file path=ppt/slides/slide54.xml><?xml version="1.0" encoding="utf-8"?>
+<p:sld xmlns:a="http://schemas.openxmlformats.org/drawingml/2006/main" xmlns:r="http://schemas.openxmlformats.org/officeDocument/2006/relationships" xmlns:p="http://schemas.openxmlformats.org/presentationml/2006/main">
+  <p:cSld>
+    <p:spTree>
+      <p:nvGrpSpPr>
+        <p:cNvPr id="1" name=""/>
+        <p:cNvGrpSpPr/>
+        <p:nvPr/>
+      </p:nvGrpSpPr>
+      <p:grpSpPr>
+        <a:xfrm>
+          <a:off x="0" y="0"/>
+          <a:ext cx="0" cy="0"/>
+          <a:chOff x="0" y="0"/>
+          <a:chExt cx="0" cy="0"/>
+        </a:xfrm>
+      </p:grpSpPr>
+      <p:sp>
+        <p:nvSpPr>
+          <p:cNvPr id="2" name="Title 1"/>
+          <p:cNvSpPr>
+            <a:spLocks noGrp="1"/>
+          </p:cNvSpPr>
+          <p:nvPr>
+            <p:ph type="title"/>
+          </p:nvPr>
+        </p:nvSpPr>
+        <p:spPr>
+          <a:xfrm>
+            <a:off x="0" y="0"/>
+            <a:ext cx="9144000" cy="582780"/>
+          </a:xfrm>
+        </p:spPr>
+        <p:txBody>
+          <a:bodyPr/>
+          <a:lstStyle/>
+          <a:p>
+            <a:pPr lvl="0" indent="0" marL="0">
+              <a:buNone/>
+            </a:pPr>
+            <a:r>
+              <a:rPr/>
+              <a:t>Getting unstuck</a:t>
+            </a:r>
+          </a:p>
+        </p:txBody>
+      </p:sp>
+      <p:sp>
+        <p:nvSpPr>
+          <p:cNvPr id="3" name="Content Placeholder 2"/>
+          <p:cNvSpPr>
+            <a:spLocks noGrp="1"/>
+          </p:cNvSpPr>
+          <p:nvPr>
+            <p:ph idx="1"/>
+          </p:nvPr>
+        </p:nvSpPr>
+        <p:spPr/>
+        <p:txBody>
+          <a:bodyPr/>
+          <a:lstStyle/>
+          <a:p>
+            <a:pPr lvl="0" indent="0" marL="0">
+              <a:buNone/>
+            </a:pPr>
+            <a:r>
+              <a:rPr/>
+              <a:t>When code breaks — and it will, that is normal:</a:t>
+            </a:r>
+          </a:p>
+          <a:p>
+            <a:pPr lvl="0" indent="-342900" marL="342900">
+              <a:buAutoNum type="arabicPeriod"/>
+            </a:pPr>
+            <a:r>
+              <a:rPr/>
+              <a:t>Read the </a:t>
+            </a:r>
+            <a:r>
+              <a:rPr b="1"/>
+              <a:t>error message</a:t>
+            </a:r>
+            <a:r>
+              <a:rPr/>
+              <a:t> out loud; it usually names the line</a:t>
+            </a:r>
+          </a:p>
+          <a:p>
+            <a:pPr lvl="0" indent="-342900" marL="342900">
+              <a:buAutoNum type="arabicPeriod"/>
+            </a:pPr>
+            <a:r>
+              <a:rPr/>
+              <a:t>Check the usual suspects: is your grouping variable a </a:t>
+            </a:r>
+            <a:r>
+              <a:rPr b="1"/>
+              <a:t>factor</a:t>
+            </a:r>
+            <a:r>
+              <a:rPr/>
+              <a:t> (</a:t>
+            </a:r>
+            <a:r>
+              <a:rPr>
+                <a:latin typeface="Courier"/>
+              </a:rPr>
+              <a:t>as.factor()</a:t>
+            </a:r>
+            <a:r>
+              <a:rPr/>
+              <a:t>)? Did you pass the model to </a:t>
+            </a:r>
+            <a:r>
+              <a:rPr>
+                <a:latin typeface="Courier"/>
+              </a:rPr>
+              <a:t>TukeyHSD()</a:t>
+            </a:r>
+            <a:r>
+              <a:rPr/>
+              <a:t> via </a:t>
+            </a:r>
+            <a:r>
+              <a:rPr>
+                <a:latin typeface="Courier"/>
+              </a:rPr>
+              <a:t>aov()</a:t>
+            </a:r>
+            <a:r>
+              <a:rPr/>
+              <a:t>, not </a:t>
+            </a:r>
+            <a:r>
+              <a:rPr>
+                <a:latin typeface="Courier"/>
+              </a:rPr>
+              <a:t>lm()</a:t>
+            </a:r>
+            <a:r>
+              <a:rPr/>
+              <a:t>? Is </a:t>
+            </a:r>
+            <a:r>
+              <a:rPr>
+                <a:latin typeface="Courier"/>
+              </a:rPr>
+              <a:t>car</a:t>
+            </a:r>
+            <a:r>
+              <a:rPr/>
+              <a:t> loaded for </a:t>
+            </a:r>
+            <a:r>
+              <a:rPr>
+                <a:latin typeface="Courier"/>
+              </a:rPr>
+              <a:t>leveneTest()</a:t>
+            </a:r>
+            <a:r>
+              <a:rPr/>
+              <a:t>, </a:t>
+            </a:r>
+            <a:r>
+              <a:rPr>
+                <a:latin typeface="Courier"/>
+              </a:rPr>
+              <a:t>FSA</a:t>
+            </a:r>
+            <a:r>
+              <a:rPr/>
+              <a:t> for </a:t>
+            </a:r>
+            <a:r>
+              <a:rPr>
+                <a:latin typeface="Courier"/>
+              </a:rPr>
+              <a:t>dunnTest()</a:t>
+            </a:r>
+            <a:r>
+              <a:rPr/>
+              <a:t>?</a:t>
+            </a:r>
+          </a:p>
+          <a:p>
+            <a:pPr lvl="0" indent="-342900" marL="342900">
+              <a:buAutoNum type="arabicPeriod"/>
+            </a:pPr>
+            <a:r>
+              <a:rPr>
+                <a:latin typeface="Courier"/>
+              </a:rPr>
+              <a:t>?function_name</a:t>
+            </a:r>
+            <a:r>
+              <a:rPr/>
+              <a:t> opens the help page</a:t>
+            </a:r>
+          </a:p>
+          <a:p>
+            <a:pPr lvl="0" indent="-342900" marL="342900">
+              <a:buAutoNum type="arabicPeriod"/>
+            </a:pPr>
+            <a:r>
+              <a:rPr/>
+              <a:t>Bring the </a:t>
+            </a:r>
+            <a:r>
+              <a:rPr b="1"/>
+              <a:t>exact error</a:t>
+            </a:r>
+            <a:r>
+              <a:rPr/>
+              <a:t> (copy-paste it) to class or office hours</a:t>
+            </a:r>
+          </a:p>
+          <a:p>
+            <a:pPr lvl="0" indent="0" marL="1270000">
+              <a:buNone/>
+            </a:pPr>
+            <a:r>
+              <a:rPr sz="2000" b="1"/>
+              <a:t>Note</a:t>
+            </a:r>
+          </a:p>
+          <a:p>
+            <a:pPr lvl="0" indent="0" marL="1270000">
+              <a:buNone/>
+            </a:pPr>
+            <a:r>
+              <a:rPr sz="2000" b="1"/>
+              <a:t>✅ Key idea</a:t>
+            </a:r>
+          </a:p>
+          <a:p>
+            <a:pPr lvl="0" indent="0" marL="1270000">
+              <a:buNone/>
+            </a:pPr>
+            <a:r>
+              <a:rPr sz="2000"/>
+              <a:t>Every working scientist googles error messages daily. Getting stuck is not failing — it is the job.</a:t>
             </a:r>
           </a:p>
         </p:txBody>
@@ -15323,7 +16587,7 @@
       </p:sp>
       <p:pic>
         <p:nvPicPr>
-          <p:cNvPr descr="analysis_of_variance_lecture_files/figure-pptx/unnamed-chunk-2-1.png" id="0" name="Picture 1"/>
+          <p:cNvPr descr="analysis_of_variance_lecture_files/figure-pptx/analysis-of-variance-02-1.png" id="0" name="Picture 1"/>
           <p:cNvPicPr>
             <a:picLocks noGrp="1" noChangeAspect="1"/>
           </p:cNvPicPr>
